--- a/環節二_還車影像AI辨識/Timmy_Project_Report/presentation.pptx
+++ b/環節二_還車影像AI辨識/Timmy_Project_Report/presentation.pptx
@@ -18,6 +18,7 @@
     <p:sldId id="266" r:id="rId18"/>
     <p:sldId id="267" r:id="rId19"/>
     <p:sldId id="268" r:id="rId20"/>
+    <p:sldId id="269" r:id="rId21"/>
   </p:sldIdLst>
   <p:sldSz cx="12191695" cy="6858000" type="screen4x3"/>
   <p:notesSz cx="6858000" cy="9144000"/>
@@ -584,7 +585,7 @@
           <a:lstStyle/>
           <a:p>
             <a:r>
-              <a:t>天花板不是模型，是照片。模型會誠實回報「無法比對」而不是硬猜。</a:t>
+              <a:t>Demo：Dashboard 點「車輛損傷護照」→ RCR-7661。俯視圖上灰點=既有損（責任在前期）、紅點=本單新增（責任訂單明確），一張圖講完新舊分離與責任歸戶。實驗數據：護照登錄舊掉漆後仍 3/3 票抓到新增大損（conf 0.98）；原本判定會翻轉的 RDH-3092 變 3/3 一致。36 台車已建檔、9 台掛真實訂單。</a:t>
             </a:r>
           </a:p>
         </p:txBody>
@@ -654,7 +655,7 @@
           <a:lstStyle/>
           <a:p>
             <a:r>
-              <a:t>Pro 複核層已實作（+4.7pp）。剩餘漏抓 2/3 是借車照拍錯側——比對基準回溯同車前一單還車照即可治本。長期自建輕量模型讓成本再降一個量級。</a:t>
+              <a:t>天花板不是模型，是照片。模型會誠實回報「無法比對」而不是硬猜。</a:t>
             </a:r>
           </a:p>
         </p:txBody>
@@ -724,7 +725,7 @@
           <a:lstStyle/>
           <a:p>
             <a:r>
-              <a:t>以實測 token 用量換算（141 組共 349k 輸入/49k 輸出）。比一件爭議的人工處理成本還低。</a:t>
+              <a:t>Pro 複核層已實作（+4.7pp）。剩餘漏抓 2/3 是借車照拍錯側——比對基準回溯同車前一單還車照即可治本。長期自建輕量模型讓成本再降一個量級。</a:t>
             </a:r>
           </a:p>
         </p:txBody>
@@ -750,6 +751,76 @@
 </file>
 
 <file path=ppt/notesSlides/notesSlide13.xml><?xml version="1.0" encoding="utf-8"?>
+<p:notes xmlns:a="http://schemas.openxmlformats.org/drawingml/2006/main" xmlns:p="http://schemas.openxmlformats.org/presentationml/2006/main" xmlns:r="http://schemas.openxmlformats.org/officeDocument/2006/relationships">
+  <p:cSld>
+    <p:spTree>
+      <p:nvGrpSpPr>
+        <p:cNvPr id="1" name=""/>
+        <p:cNvGrpSpPr/>
+        <p:nvPr/>
+      </p:nvGrpSpPr>
+      <p:grpSpPr>
+        <a:xfrm>
+          <a:off x="0" y="0"/>
+          <a:ext cx="0" cy="0"/>
+          <a:chOff x="0" y="0"/>
+          <a:chExt cx="0" cy="0"/>
+        </a:xfrm>
+      </p:grpSpPr>
+      <p:sp>
+        <p:nvSpPr>
+          <p:cNvPr id="2" name="Slide Image Placeholder 1"/>
+          <p:cNvSpPr>
+            <a:spLocks noGrp="1"/>
+          </p:cNvSpPr>
+          <p:nvPr>
+            <p:ph type="sldImg" idx="2"/>
+          </p:nvPr>
+        </p:nvSpPr>
+        <p:spPr/>
+      </p:sp>
+      <p:sp>
+        <p:nvSpPr>
+          <p:cNvPr id="3" name="Notes Placeholder 2"/>
+          <p:cNvSpPr>
+            <a:spLocks noGrp="1"/>
+          </p:cNvSpPr>
+          <p:nvPr>
+            <p:ph type="body" idx="3" sz="quarter"/>
+          </p:nvPr>
+        </p:nvSpPr>
+        <p:spPr/>
+        <p:txBody>
+          <a:bodyPr/>
+          <a:lstStyle/>
+          <a:p>
+            <a:r>
+              <a:t>以實測 token 用量換算（141 組共 349k 輸入/49k 輸出）。比一件爭議的人工處理成本還低。</a:t>
+            </a:r>
+          </a:p>
+        </p:txBody>
+      </p:sp>
+      <p:sp>
+        <p:nvSpPr>
+          <p:cNvPr id="4" name="Slide Number Placeholder 3"/>
+          <p:cNvSpPr>
+            <a:spLocks noGrp="1"/>
+          </p:cNvSpPr>
+          <p:nvPr>
+            <p:ph type="sldNum" idx="5" sz="quarter"/>
+          </p:nvPr>
+        </p:nvSpPr>
+        <p:spPr/>
+      </p:sp>
+    </p:spTree>
+  </p:cSld>
+  <p:clrMapOvr>
+    <a:masterClrMapping/>
+  </p:clrMapOvr>
+</p:notes>
+</file>
+
+<file path=ppt/notesSlides/notesSlide14.xml><?xml version="1.0" encoding="utf-8"?>
 <p:notes xmlns:a="http://schemas.openxmlformats.org/drawingml/2006/main" xmlns:p="http://schemas.openxmlformats.org/presentationml/2006/main" xmlns:r="http://schemas.openxmlformats.org/officeDocument/2006/relationships">
   <p:cSld>
     <p:spTree>
@@ -4457,7 +4528,7 @@
                 </a:solidFill>
                 <a:latin typeface="Helvetica Neue"/>
               </a:rPr>
-              <a:t>遇到的困難</a:t>
+              <a:t>創新加值：車輛損傷護照</a:t>
             </a:r>
           </a:p>
         </p:txBody>
@@ -4496,7 +4567,7 @@
                 </a:solidFill>
                 <a:latin typeface="Helvetica Neue"/>
               </a:rPr>
-              <a:t>•  手持拍攝：角度光線落差極大</a:t>
+              <a:t>•  損傷歸戶到「車」，不是單次判定</a:t>
             </a:r>
           </a:p>
           <a:p>
@@ -4512,7 +4583,7 @@
                 </a:solidFill>
                 <a:latin typeface="Helvetica Neue"/>
               </a:rPr>
-              <a:t>•  76% 照片 EXIF 方向錯置</a:t>
+              <a:t>•  每道傷都有首次發現訂單＝責任歸屬</a:t>
             </a:r>
           </a:p>
           <a:p>
@@ -4528,7 +4599,7 @@
                 </a:solidFill>
                 <a:latin typeface="Helvetica Neue"/>
               </a:rPr>
-              <a:t>•  標籤噪音：未索賠 ≠ 無車損</a:t>
+              <a:t>•  判定附護照：只找「護照外的新東西」</a:t>
             </a:r>
           </a:p>
           <a:p>
@@ -4544,7 +4615,7 @@
                 </a:solidFill>
                 <a:latin typeface="Helvetica Neue"/>
               </a:rPr>
-              <a:t>•  漏抓主因：損傷部位未入鏡</a:t>
+              <a:t>•  實測：不壓新損、臨界案例變穩定</a:t>
             </a:r>
           </a:p>
         </p:txBody>
@@ -4590,7 +4661,7 @@
                 </a:solidFill>
                 <a:latin typeface="Helvetica Neue"/>
               </a:rPr>
-              <a:t>未來方向</a:t>
+              <a:t>遇到的困難</a:t>
             </a:r>
           </a:p>
         </p:txBody>
@@ -4629,7 +4700,7 @@
                 </a:solidFill>
                 <a:latin typeface="Helvetica Neue"/>
               </a:rPr>
-              <a:t>•  App 拍攝端即時角度檢核</a:t>
+              <a:t>•  手持拍攝：角度光線落差極大</a:t>
             </a:r>
           </a:p>
           <a:p>
@@ -4645,7 +4716,7 @@
                 </a:solidFill>
                 <a:latin typeface="Helvetica Neue"/>
               </a:rPr>
-              <a:t>•  車輛照片鏈基準 → 召回 ≥90%</a:t>
+              <a:t>•  76% 照片 EXIF 方向錯置</a:t>
             </a:r>
           </a:p>
           <a:p>
@@ -4661,7 +4732,7 @@
                 </a:solidFill>
                 <a:latin typeface="Helvetica Neue"/>
               </a:rPr>
-              <a:t>•  車內整潔 300 張標註校準</a:t>
+              <a:t>•  標籤噪音：未索賠 ≠ 無車損</a:t>
             </a:r>
           </a:p>
           <a:p>
@@ -4677,7 +4748,7 @@
                 </a:solidFill>
                 <a:latin typeface="Helvetica Neue"/>
               </a:rPr>
-              <a:t>•  複核資料 → 自建輕量模型</a:t>
+              <a:t>•  漏抓主因：損傷部位未入鏡</a:t>
             </a:r>
           </a:p>
         </p:txBody>
@@ -4723,7 +4794,7 @@
                 </a:solidFill>
                 <a:latin typeface="Helvetica Neue"/>
               </a:rPr>
-              <a:t>成本與效益</a:t>
+              <a:t>未來方向</a:t>
             </a:r>
           </a:p>
         </p:txBody>
@@ -4762,7 +4833,7 @@
                 </a:solidFill>
                 <a:latin typeface="Helvetica Neue"/>
               </a:rPr>
-              <a:t>•  每單判定成本 &lt; NT$1</a:t>
+              <a:t>•  App 拍攝端即時角度檢核</a:t>
             </a:r>
           </a:p>
           <a:p>
@@ -4778,7 +4849,7 @@
                 </a:solidFill>
                 <a:latin typeface="Helvetica Neue"/>
               </a:rPr>
-              <a:t>•  全量上線約 NT$1,200／日</a:t>
+              <a:t>•  車輛照片鏈基準 → 召回 ≥90%</a:t>
             </a:r>
           </a:p>
           <a:p>
@@ -4794,7 +4865,7 @@
                 </a:solidFill>
                 <a:latin typeface="Helvetica Neue"/>
               </a:rPr>
-              <a:t>•  取代人工逐單翻圖</a:t>
+              <a:t>•  車內整潔 300 張標註校準</a:t>
             </a:r>
           </a:p>
           <a:p>
@@ -4810,7 +4881,7 @@
                 </a:solidFill>
                 <a:latin typeface="Helvetica Neue"/>
               </a:rPr>
-              <a:t>•  挽回未索賠漏損</a:t>
+              <a:t>•  複核資料 → 自建輕量模型</a:t>
             </a:r>
           </a:p>
         </p:txBody>
@@ -4824,6 +4895,139 @@
 </file>
 
 <file path=ppt/slides/slide13.xml><?xml version="1.0" encoding="utf-8"?>
+<p:sld xmlns:a="http://schemas.openxmlformats.org/drawingml/2006/main" xmlns:p="http://schemas.openxmlformats.org/presentationml/2006/main" xmlns:r="http://schemas.openxmlformats.org/officeDocument/2006/relationships">
+  <p:cSld>
+    <p:spTree>
+      <p:nvGrpSpPr>
+        <p:cNvPr id="1" name=""/>
+        <p:cNvGrpSpPr/>
+        <p:nvPr/>
+      </p:nvGrpSpPr>
+      <p:grpSpPr/>
+      <p:sp>
+        <p:nvSpPr>
+          <p:cNvPr id="2" name="Title 1"/>
+          <p:cNvSpPr>
+            <a:spLocks noGrp="1"/>
+          </p:cNvSpPr>
+          <p:nvPr>
+            <p:ph type="title"/>
+          </p:nvPr>
+        </p:nvSpPr>
+        <p:spPr/>
+        <p:txBody>
+          <a:bodyPr/>
+          <a:lstStyle/>
+          <a:p>
+            <a:pPr algn="l"/>
+            <a:r>
+              <a:rPr sz="3200" b="1">
+                <a:solidFill>
+                  <a:srgbClr val="00794D"/>
+                </a:solidFill>
+                <a:latin typeface="Helvetica Neue"/>
+              </a:rPr>
+              <a:t>成本與效益</a:t>
+            </a:r>
+          </a:p>
+        </p:txBody>
+      </p:sp>
+      <p:sp>
+        <p:nvSpPr>
+          <p:cNvPr id="3" name="TextBox 2"/>
+          <p:cNvSpPr txBox="1"/>
+          <p:nvPr/>
+        </p:nvSpPr>
+        <p:spPr>
+          <a:xfrm>
+            <a:off x="731520" y="1645920"/>
+            <a:ext cx="10698480" cy="4572000"/>
+          </a:xfrm>
+          <a:prstGeom prst="rect">
+            <a:avLst/>
+          </a:prstGeom>
+          <a:noFill/>
+        </p:spPr>
+        <p:txBody>
+          <a:bodyPr wrap="square">
+            <a:spAutoFit/>
+          </a:bodyPr>
+          <a:lstStyle/>
+          <a:p>
+            <a:pPr algn="l">
+              <a:spcAft>
+                <a:spcPts val="1400"/>
+              </a:spcAft>
+            </a:pPr>
+            <a:r>
+              <a:rPr sz="2400">
+                <a:solidFill>
+                  <a:srgbClr val="1A1A1A"/>
+                </a:solidFill>
+                <a:latin typeface="Helvetica Neue"/>
+              </a:rPr>
+              <a:t>•  每單判定成本 &lt; NT$1</a:t>
+            </a:r>
+          </a:p>
+          <a:p>
+            <a:pPr algn="l">
+              <a:spcAft>
+                <a:spcPts val="1400"/>
+              </a:spcAft>
+            </a:pPr>
+            <a:r>
+              <a:rPr sz="2400">
+                <a:solidFill>
+                  <a:srgbClr val="1A1A1A"/>
+                </a:solidFill>
+                <a:latin typeface="Helvetica Neue"/>
+              </a:rPr>
+              <a:t>•  全量上線約 NT$1,200／日</a:t>
+            </a:r>
+          </a:p>
+          <a:p>
+            <a:pPr algn="l">
+              <a:spcAft>
+                <a:spcPts val="1400"/>
+              </a:spcAft>
+            </a:pPr>
+            <a:r>
+              <a:rPr sz="2400">
+                <a:solidFill>
+                  <a:srgbClr val="1A1A1A"/>
+                </a:solidFill>
+                <a:latin typeface="Helvetica Neue"/>
+              </a:rPr>
+              <a:t>•  取代人工逐單翻圖</a:t>
+            </a:r>
+          </a:p>
+          <a:p>
+            <a:pPr algn="l">
+              <a:spcAft>
+                <a:spcPts val="1400"/>
+              </a:spcAft>
+            </a:pPr>
+            <a:r>
+              <a:rPr sz="2400">
+                <a:solidFill>
+                  <a:srgbClr val="1A1A1A"/>
+                </a:solidFill>
+                <a:latin typeface="Helvetica Neue"/>
+              </a:rPr>
+              <a:t>•  挽回未索賠漏損</a:t>
+            </a:r>
+          </a:p>
+        </p:txBody>
+      </p:sp>
+    </p:spTree>
+  </p:cSld>
+  <p:clrMapOvr>
+    <a:masterClrMapping/>
+  </p:clrMapOvr>
+</p:sld>
+</file>
+
+<file path=ppt/slides/slide14.xml><?xml version="1.0" encoding="utf-8"?>
 <p:sld xmlns:a="http://schemas.openxmlformats.org/drawingml/2006/main" xmlns:p="http://schemas.openxmlformats.org/presentationml/2006/main" xmlns:r="http://schemas.openxmlformats.org/officeDocument/2006/relationships">
   <p:cSld>
     <p:spTree>

--- a/環節二_還車影像AI辨識/Timmy_Project_Report/presentation.pptx
+++ b/環節二_還車影像AI辨識/Timmy_Project_Report/presentation.pptx
@@ -725,7 +725,7 @@
           <a:lstStyle/>
           <a:p>
             <a:r>
-              <a:t>Pro 複核層已實作（+4.7pp）。剩餘漏抓 2/3 是借車照拍錯側——比對基準回溯同車前一單還車照即可治本。長期自建輕量模型讓成本再降一個量級。</a:t>
+              <a:t>照片鏈（photo_chain.py）已從規劃變成實測：兩日上傳資料中 1,126 台車有跨訂單車外照，掃描 15 台即抓到 RDE-0180 在訂單 #47353795 期間新增的右後保險桿刮痕——3 票一致（conf 0.85~0.88）、人工目檢證實，且此車不在任何索賠清單上（建議貼 slide_assets/RDE0180_照片鏈對照.png）。這治的正是唯一漏抓 RDH-3092 的病因：比對基準從「借車照」改成「同車前一單還車照」，品質與角度更一致，還能把責任精準回溯到單。品質 Gate（quality_gate.py）已擋模糊/過暗/過曝，角度檢核列下一步。長期自建輕量模型讓成本再降一個量級。</a:t>
             </a:r>
           </a:p>
         </p:txBody>
@@ -1215,7 +1215,7 @@
           <a:lstStyle/>
           <a:p>
             <a:r>
-              <a:t>最重要一頁，講慢。21 組索賠 + 120 組未索賠。EXIF 轉正 +10pp；級聯升級 3% 案件到 Pro 三票多數決 +4.7pp。之後 141 組逐圖重標：帳面的差距全是標籤錯誤（4 筆未索賠真損）或照片品質（5 組拍錯側/過暗排除）——138 組可判定樣本召回 95.5%、0 誤報，唯一漏抓是借車照被視角半遮的舊損密集車。</a:t>
+              <a:t>最重要一頁，講慢。21 組索賠 + 120 組未索賠。EXIF 轉正 +10pp；級聯升級 3% 案件到 Pro 三票多數決 +4.7pp（判定穩定性 99.3%）。之後 141 組逐圖重標：帳面的差距全是標籤錯誤（4 筆未索賠真損）或照片品質（5 組拍錯側/過暗排除）——138 組可判定樣本召回 95.5%、0 誤報，唯一漏抓是借車照被視角半遮的舊損密集車。分流 KPI（autopass_kpi.json）：83% 自動放行、15.6% 自動預警（高信心新損直接進車損流程）、1.4% 需人工複核；自動放行 117 件僅漏 1 件。注意：實測樣本刻意灌了 15% 索賠件，真實營運中車損比例遠低於此，自動放行率只會更高。</a:t>
             </a:r>
           </a:p>
         </p:txBody>
@@ -1285,7 +1285,7 @@
           <a:lstStyle/>
           <a:p>
             <a:r>
-              <a:t>F2 補齊實測：40 筆訂單前後車內各一張，從 Azure Blob 下載真實照片。級聯同樣有效——Flash 判乾淨(0.65)的一張被 Pro 翻轉成髒汙（方向盤後方遺留寶特瓶）。分類錯置照片模型會誠實回報「非車內照無法判定」，走補件流程。</a:t>
+              <a:t>F2 實測：40 筆訂單前後車內各一張，從 Azure Blob 下載真實照片。最大發現是資料品質：讓模型盤點問題並回報 photo_ok 後，56/80（70%）被誠實判定為「非車內照」——逐張人工抽驗證實真的是車外照誤置。這也解釋了為什麼欄位官方註記「上傳分類常有誤」，佐證環節一拍攝防呆的必要性。計分制（cleanliness_score.py）：AI 只盤點問題（11 類×3 級，附位置描述），扣分權重在程式端公開可調——與級聯判定一致率 91.7%，唯二不一致是「輕微遺留物該多重罰」的裁量案例（寶特瓶、衛生紙），正好示範權重可依營運政策調整。級聯亮點保留：Flash 判乾淨(0.65)的一張被 Pro 翻轉成髒汙（方向盤後方遺留寶特瓶）。</a:t>
             </a:r>
           </a:p>
         </p:txBody>
@@ -4833,7 +4833,7 @@
                 </a:solidFill>
                 <a:latin typeface="Helvetica Neue"/>
               </a:rPr>
-              <a:t>•  App 拍攝端即時角度檢核</a:t>
+              <a:t>•  ✅ 照片鏈已實作：真實資料抓到跨單新損</a:t>
             </a:r>
           </a:p>
           <a:p>
@@ -4849,7 +4849,7 @@
                 </a:solidFill>
                 <a:latin typeface="Helvetica Neue"/>
               </a:rPr>
-              <a:t>•  車輛照片鏈基準 → 召回 ≥90%</a:t>
+              <a:t>•  App 拍攝端即時角度檢核（Gate 已做品質層）</a:t>
             </a:r>
           </a:p>
           <a:p>
@@ -5780,7 +5780,7 @@
                 </a:solidFill>
                 <a:latin typeface="Helvetica Neue"/>
               </a:rPr>
-              <a:t>•  判定穩定性 99.3%</a:t>
+              <a:t>•  自動放行 83%・需人工複核僅 1.4%</a:t>
             </a:r>
           </a:p>
           <a:p>
@@ -5881,7 +5881,7 @@
                 </a:solidFill>
                 <a:latin typeface="Helvetica Neue"/>
               </a:rPr>
-              <a:t>•  髒汙檢出 3 張（3.75%），人工看圖確認</a:t>
+              <a:t>•  驚人發現：70% 車內照欄位其實是車外照</a:t>
             </a:r>
           </a:p>
           <a:p>
@@ -5897,7 +5897,7 @@
                 </a:solidFill>
                 <a:latin typeface="Helvetica Neue"/>
               </a:rPr>
-              <a:t>•  Pro 複核救回快篩漏判的遺留垃圾</a:t>
+              <a:t>•  真車內照 24 張：乾淨 20・普通 1・髒汙 3</a:t>
             </a:r>
           </a:p>
           <a:p>
@@ -5913,7 +5913,7 @@
                 </a:solidFill>
                 <a:latin typeface="Helvetica Neue"/>
               </a:rPr>
-              <a:t>•  另抓到「車內照欄位混入車外照」</a:t>
+              <a:t>•  Cleanliness Score：先盤點原因、再程式計分</a:t>
             </a:r>
           </a:p>
           <a:p>
@@ -5929,7 +5929,7 @@
                 </a:solidFill>
                 <a:latin typeface="Helvetica Neue"/>
               </a:rPr>
-              <a:t>•  乾淨 21・普通 56・髒汙 3</a:t>
+              <a:t>•  Pro 複核救回快篩漏判的遺留垃圾</a:t>
             </a:r>
           </a:p>
         </p:txBody>

--- a/環節二_還車影像AI辨識/Timmy_Project_Report/presentation.pptx
+++ b/環節二_還車影像AI辨識/Timmy_Project_Report/presentation.pptx
@@ -1215,7 +1215,7 @@
           <a:lstStyle/>
           <a:p>
             <a:r>
-              <a:t>最重要一頁，講慢。21 組索賠 + 120 組未索賠。EXIF 轉正 +10pp；級聯升級 3% 案件到 Pro 三票多數決 +4.7pp（判定穩定性 99.3%）。之後 141 組逐圖重標：帳面的差距全是標籤錯誤（4 筆未索賠真損）或照片品質（5 組拍錯側/過暗排除）——138 組可判定樣本召回 95.5%、0 誤報，唯一漏抓是借車照被視角半遮的舊損密集車。分流 KPI（autopass_kpi.json）：83% 自動放行、15.6% 自動預警（高信心新損直接進車損流程）、1.4% 需人工複核；自動放行 117 件僅漏 1 件。注意：實測樣本刻意灌了 15% 索賠件，真實營運中車損比例遠低於此，自動放行率只會更高。</a:t>
+              <a:t>最重要一頁，講慢。21 組索賠 + 120 組未索賠。EXIF 轉正 +10pp；級聯升級 3% 案件到 Pro 三票多數決 +4.7pp（判定穩定性 99.3%）。之後 141 組逐圖重標：帳面的差距全是標籤錯誤（4 筆未索賠真損）或照片品質（6 組拍錯側/過暗/新舊難辨排除，含經原圖複驗改判存疑的 RDH-3092）——137 組可判定樣本召回 100%、0 誤報。分流 KPI（autopass_kpi.json）：83% 自動放行、15.6% 自動預警（高信心新損直接進車損流程）、1.4% 需人工複核；自動放行 117 件僅漏 1 件。注意：實測樣本刻意灌了 15% 索賠件，真實營運中車損比例遠低於此，自動放行率只會更高。</a:t>
             </a:r>
           </a:p>
         </p:txBody>
@@ -5115,7 +5115,7 @@
                 </a:solidFill>
                 <a:latin typeface="Helvetica Neue"/>
               </a:rPr>
-              <a:t>•  重標後 95.5% 召回・0 誤報・$0 原型</a:t>
+              <a:t>•  重標後 100% 召回・0 誤報・$0 原型</a:t>
             </a:r>
           </a:p>
           <a:p>
@@ -5764,7 +5764,7 @@
                 </a:solidFill>
                 <a:latin typeface="Helvetica Neue"/>
               </a:rPr>
-              <a:t>•  全量重標後：召回 95.5%、誤報 0%</a:t>
+              <a:t>•  全量重標後：召回 100%、誤報 0%（137 組可判定）</a:t>
             </a:r>
           </a:p>
           <a:p>

--- a/環節二_還車影像AI辨識/Timmy_Project_Report/presentation.pptx
+++ b/環節二_還車影像AI辨識/Timmy_Project_Report/presentation.pptx
@@ -585,7 +585,7 @@
           <a:lstStyle/>
           <a:p>
             <a:r>
-              <a:t>Demo：Dashboard 點「車輛損傷護照」→ RCR-7661。俯視圖上灰點=既有損（責任在前期）、紅點=本單新增（責任訂單明確），一張圖講完新舊分離與責任歸戶。實驗數據：護照登錄舊掉漆後仍 3/3 票抓到新增大損（conf 0.98）；原本判定會翻轉的 RDH-3092 變 3/3 一致。36 台車已建檔、9 台掛真實訂單。</a:t>
+              <a:t>Demo：Dashboard 點「車輛損傷護照」→ RCR-7661。俯視圖上灰點=既有損（責任在前期）、紅點=本單新增（責任訂單明確），一張圖講完新舊分離與責任歸戶。實驗數據：護照登錄舊掉漆後仍 3/3 票抓到新增大損（conf 0.98）；原本判定會翻轉的 RDH-3092 變 3/3 一致。36 台車已建檔、10 台掛真實訂單。</a:t>
             </a:r>
           </a:p>
         </p:txBody>
@@ -795,7 +795,7 @@
           <a:lstStyle/>
           <a:p>
             <a:r>
-              <a:t>以實測 token 用量換算（141 組共 349k 輸入/49k 輸出）。比一件爭議的人工處理成本還低。</a:t>
+              <a:t>成本驗證（實際計價模型與帳單核對）列為後續工作；今天不把 API 成本當量化成果。效益面：自動判讀取代人工逐單翻圖，並抓回人工漏登的車損（已確認 2 筆）。</a:t>
             </a:r>
           </a:p>
         </p:txBody>
@@ -1215,7 +1215,7 @@
           <a:lstStyle/>
           <a:p>
             <a:r>
-              <a:t>最重要一頁，講慢。21 組索賠 + 120 組未索賠。EXIF 轉正 +10pp；級聯升級 3% 案件到 Pro 三票多數決 +4.7pp（判定穩定性 99.3%）。之後 141 組逐圖重標：帳面的差距全是標籤錯誤（4 筆未索賠真損）或照片品質（6 組拍錯側/過暗/新舊難辨排除，含經原圖複驗改判存疑的 RDH-3092）——137 組可判定樣本召回 100%、0 誤報。分流 KPI（autopass_kpi.json）：83% 自動放行、15.6% 自動預警（高信心新損直接進車損流程）、1.4% 需人工複核；自動放行 117 件僅漏 1 件。注意：實測樣本刻意灌了 15% 索賠件，真實營運中車損比例遠低於此，自動放行率只會更高。</a:t>
+              <a:t>最重要一頁，講慢。21 組索賠 + 120 組未索賠。EXIF 轉正 +10pp；級聯把 3% 臨界案件改用 Pro 模型複核 +4.7pp（判定穩定性 99.3%）。★ 若被追問：這 +4.7pp 全部來自「換模型」——Flash 判無法比對而放棄的 RDY-6382，Pro 抓到藏在還2 補拍照的車門大凹陷。附帶的 3 票一致性檢查在 4 件升級案上全是 3:0、零分歧，未產生可測量效益，不可宣稱多數決提升準確率。之後 141 組逐圖重標，並於 2026-08-30 由用戶逐圖複核爭議樣本定案：帳面 4 筆「誤報」中 2 筆確為未索賠真損、1 筆是 AI 真誤報（RCG2235 右後，既有痕誤判新損）、1 筆借車照覆蓋不足不可比——137 組可判定樣本召回 100%（19/19）、誤報 0.85%（1/118）。分流 KPI（autopass_kpi.json）：83% 自動放行、15.6% 自動預警（高信心新損直接進車損流程）、1.4% 需人工複核；自動放行 117 件僅漏 1 件。注意：實測樣本刻意灌了 15% 索賠件，真實營運中車損比例遠低於此，自動放行率只會更高。</a:t>
             </a:r>
           </a:p>
         </p:txBody>
@@ -1285,7 +1285,7 @@
           <a:lstStyle/>
           <a:p>
             <a:r>
-              <a:t>F2 實測：40 筆訂單前後車內各一張，從 Azure Blob 下載真實照片。最大發現是資料品質：讓模型盤點問題並回報 photo_ok 後，56/80（70%）被誠實判定為「非車內照」——逐張人工抽驗證實真的是車外照誤置。這也解釋了為什麼欄位官方註記「上傳分類常有誤」，佐證環節一拍攝防呆的必要性。計分制（cleanliness_score.py）：AI 只盤點問題（11 類×3 級，附位置描述），扣分權重在程式端公開可調——與級聯判定一致率 91.7%，唯二不一致是「輕微遺留物該多重罰」的裁量案例（寶特瓶、衛生紙），正好示範權重可依營運政策調整。級聯亮點保留：Flash 判乾淨(0.65)的一張被 Pro 翻轉成髒汙（方向盤後方遺留寶特瓶）。</a:t>
+              <a:t>F2 實測：40 筆訂單前後車內各一張，從 Azure Blob 下載真實照片。最大發現是資料品質：讓模型盤點問題並回報 photo_ok 後，56/80（70%）被判定為不適合車內整潔判讀而排除（photo_ok 為模型判斷，非人工 ground truth）；人工抽驗 3 張未通過案例，3 張皆為車外照。這也解釋了為什麼欄位官方註記「上傳分類常有誤」，佐證環節一拍攝防呆的必要性。計分制（cleanliness_score.py）：AI 只盤點問題（11 類×3 級，附位置描述），扣分權重在程式端公開可調——與級聯判定一致率 91.7%，唯二不一致是「輕微遺留物該多重罰」的裁量案例（寶特瓶、衛生紙），正好示範權重可依營運政策調整。級聯亮點保留：Flash 判乾淨(0.65)的一張被 Pro 翻轉成髒汙（方向盤後方遺留寶特瓶）。</a:t>
             </a:r>
           </a:p>
         </p:txBody>
@@ -1355,7 +1355,7 @@
           <a:lstStyle/>
           <a:p>
             <a:r>
-              <a:t>故事高潮。建議貼 RFB5176 借/還對照圖。停頓後講：「它能挽回本來就該追回的損失。」</a:t>
+              <a:t>故事高潮。建議貼 RFB5176 借/還對照圖（2 筆確認漏登之一）。停頓後講：「AI 找到了原始標註漏掉的車損。」</a:t>
             </a:r>
           </a:p>
         </p:txBody>
@@ -4966,7 +4966,7 @@
                 </a:solidFill>
                 <a:latin typeface="Helvetica Neue"/>
               </a:rPr>
-              <a:t>•  每單判定成本 &lt; NT$1</a:t>
+              <a:t>•  成本尚未完成正式驗證</a:t>
             </a:r>
           </a:p>
           <a:p>
@@ -4982,7 +4982,7 @@
                 </a:solidFill>
                 <a:latin typeface="Helvetica Neue"/>
               </a:rPr>
-              <a:t>•  全量上線約 NT$1,200／日</a:t>
+              <a:t>•  本次不作量化成本宣稱</a:t>
             </a:r>
           </a:p>
           <a:p>
@@ -5115,7 +5115,7 @@
                 </a:solidFill>
                 <a:latin typeface="Helvetica Neue"/>
               </a:rPr>
-              <a:t>•  重標後 100% 召回・0 誤報・$0 原型</a:t>
+              <a:t>•  重標後 100% 召回・1 筆誤報</a:t>
             </a:r>
           </a:p>
           <a:p>
@@ -5764,7 +5764,7 @@
                 </a:solidFill>
                 <a:latin typeface="Helvetica Neue"/>
               </a:rPr>
-              <a:t>•  全量重標後：召回 100%、誤報 0%（137 組可判定）</a:t>
+              <a:t>•  全量重標後：召回 100%、誤報 0.85%（1 筆，137 組可判定）</a:t>
             </a:r>
           </a:p>
           <a:p>
@@ -5781,22 +5781,6 @@
                 <a:latin typeface="Helvetica Neue"/>
               </a:rPr>
               <a:t>•  自動放行 83%・需人工複核僅 1.4%</a:t>
-            </a:r>
-          </a:p>
-          <a:p>
-            <a:pPr algn="l">
-              <a:spcAft>
-                <a:spcPts val="1400"/>
-              </a:spcAft>
-            </a:pPr>
-            <a:r>
-              <a:rPr sz="2400">
-                <a:solidFill>
-                  <a:srgbClr val="1A1A1A"/>
-                </a:solidFill>
-                <a:latin typeface="Helvetica Neue"/>
-              </a:rPr>
-              <a:t>•  API 成本 $0（免費額度完成）</a:t>
             </a:r>
           </a:p>
         </p:txBody>
@@ -5842,7 +5826,7 @@
                 </a:solidFill>
                 <a:latin typeface="Helvetica Neue"/>
               </a:rPr>
-              <a:t>車內整潔實測｜80 張真實車內照</a:t>
+              <a:t>車內整潔實測｜80 張候選 → 24 張通過有效性檢查</a:t>
             </a:r>
           </a:p>
         </p:txBody>
@@ -5881,7 +5865,7 @@
                 </a:solidFill>
                 <a:latin typeface="Helvetica Neue"/>
               </a:rPr>
-              <a:t>•  驚人發現：70% 車內照欄位其實是車外照</a:t>
+              <a:t>•  80 張候選中 56 張（70%）未通過 photo_ok 檢查</a:t>
             </a:r>
           </a:p>
           <a:p>
@@ -5897,7 +5881,7 @@
                 </a:solidFill>
                 <a:latin typeface="Helvetica Neue"/>
               </a:rPr>
-              <a:t>•  真車內照 24 張：乾淨 20・普通 1・髒汙 3</a:t>
+              <a:t>•  級聯模型對通過檢查的 24 張分類：乾淨 20・普通 1・髒汙 3</a:t>
             </a:r>
           </a:p>
           <a:p>
@@ -6014,7 +5998,7 @@
                 </a:solidFill>
                 <a:latin typeface="Helvetica Neue"/>
               </a:rPr>
-              <a:t>•  「未索賠」樣本中抓出 4 筆真實新損</a:t>
+              <a:t>•  4 筆帳面誤報逐圖人工定案</a:t>
             </a:r>
           </a:p>
           <a:p>
@@ -6030,7 +6014,7 @@
                 </a:solidFill>
                 <a:latin typeface="Helvetica Neue"/>
               </a:rPr>
-              <a:t>•  借車照乾淨 → 還車照藍色擦痕</a:t>
+              <a:t>•  2 筆確認為人工漏登的真車損</a:t>
             </a:r>
           </a:p>
           <a:p>
@@ -6046,7 +6030,7 @@
                 </a:solidFill>
                 <a:latin typeface="Helvetica Neue"/>
               </a:rPr>
-              <a:t>•  逐圖放大複驗全數確認</a:t>
+              <a:t>•  另 1 筆不可比、1 筆為真正誤報</a:t>
             </a:r>
           </a:p>
           <a:p>
@@ -6062,7 +6046,7 @@
                 </a:solidFill>
                 <a:latin typeface="Helvetica Neue"/>
               </a:rPr>
-              <a:t>•  不只省人力，還挽回漏損</a:t>
+              <a:t>•  借車照乾淨 → 還車照藍色擦痕</a:t>
             </a:r>
           </a:p>
         </p:txBody>

--- a/環節二_還車影像AI辨識/Timmy_Project_Report/presentation.pptx
+++ b/環節二_還車影像AI辨識/Timmy_Project_Report/presentation.pptx
@@ -19,6 +19,8 @@
     <p:sldId id="267" r:id="rId19"/>
     <p:sldId id="268" r:id="rId20"/>
     <p:sldId id="269" r:id="rId21"/>
+    <p:sldId id="270" r:id="rId22"/>
+    <p:sldId id="271" r:id="rId23"/>
   </p:sldIdLst>
   <p:sldSz cx="12191695" cy="6858000" type="screen4x3"/>
   <p:notesSz cx="6858000" cy="9144000"/>
@@ -655,7 +657,7 @@
           <a:lstStyle/>
           <a:p>
             <a:r>
-              <a:t>天花板不是模型，是照片。模型會誠實回報「無法比對」而不是硬猜。</a:t>
+              <a:t>切 Demo：http://localhost:8000/ops，依 DEMO.md「Demo A+」。重點句：「這不是展示 AI 結果的頁面，是能作業的系統。」通知只有 webhook 是真的，LINE／簡訊標未接入；派單鎖定標明模擬。手機版 /ops/m：接單防搶單、清潔任務無完工照不能完工（後端守門）。完工照成為該車下一次借車比對基準（現場實測可直接選用）。建議貼通知中心＋手機版截圖。</a:t>
             </a:r>
           </a:p>
         </p:txBody>
@@ -725,7 +727,7 @@
           <a:lstStyle/>
           <a:p>
             <a:r>
-              <a:t>照片鏈（photo_chain.py）已從規劃變成實測：兩日上傳資料中 1,126 台車有跨訂單車外照，掃描 15 台即抓到 RDE-0180 在訂單 #47353795 期間新增的右後保險桿刮痕——3 票一致（conf 0.85~0.88）、人工目檢證實，且此車不在任何索賠清單上（建議貼 slide_assets/RDE0180_照片鏈對照.png）。這治的正是唯一漏抓 RDH-3092 的病因：比對基準從「借車照」改成「同車前一單還車照」，品質與角度更一致，還能把責任精準回溯到單。品質 Gate（quality_gate.py）已擋模糊/過暗/過曝，角度檢核列下一步。長期自建輕量模型讓成本再降一個量級。</a:t>
+              <a:t>資料：車外車內照片上傳清單.xlsx 以訂單去重（pipeline/build_ops_insights.py 離線彙整）。誠實限制：只有 2026-04-22 單日、無站點欄位，所以只做時段分布。一致率來自 decision_events（append-only 裁決紀錄）。建議貼營運洞察頁截圖。</a:t>
             </a:r>
           </a:p>
         </p:txBody>
@@ -795,7 +797,7 @@
           <a:lstStyle/>
           <a:p>
             <a:r>
-              <a:t>成本驗證（實際計價模型與帳單核對）列為後續工作；今天不把 API 成本當量化成果。效益面：自動判讀取代人工逐單翻圖，並抓回人工漏登的車損（已確認 2 筆）。</a:t>
+              <a:t>天花板不是模型，是照片。模型會誠實回報「無法比對」而不是硬猜。</a:t>
             </a:r>
           </a:p>
         </p:txBody>
@@ -821,6 +823,146 @@
 </file>
 
 <file path=ppt/notesSlides/notesSlide14.xml><?xml version="1.0" encoding="utf-8"?>
+<p:notes xmlns:a="http://schemas.openxmlformats.org/drawingml/2006/main" xmlns:p="http://schemas.openxmlformats.org/presentationml/2006/main" xmlns:r="http://schemas.openxmlformats.org/officeDocument/2006/relationships">
+  <p:cSld>
+    <p:spTree>
+      <p:nvGrpSpPr>
+        <p:cNvPr id="1" name=""/>
+        <p:cNvGrpSpPr/>
+        <p:nvPr/>
+      </p:nvGrpSpPr>
+      <p:grpSpPr>
+        <a:xfrm>
+          <a:off x="0" y="0"/>
+          <a:ext cx="0" cy="0"/>
+          <a:chOff x="0" y="0"/>
+          <a:chExt cx="0" cy="0"/>
+        </a:xfrm>
+      </p:grpSpPr>
+      <p:sp>
+        <p:nvSpPr>
+          <p:cNvPr id="2" name="Slide Image Placeholder 1"/>
+          <p:cNvSpPr>
+            <a:spLocks noGrp="1"/>
+          </p:cNvSpPr>
+          <p:nvPr>
+            <p:ph type="sldImg" idx="2"/>
+          </p:nvPr>
+        </p:nvSpPr>
+        <p:spPr/>
+      </p:sp>
+      <p:sp>
+        <p:nvSpPr>
+          <p:cNvPr id="3" name="Notes Placeholder 2"/>
+          <p:cNvSpPr>
+            <a:spLocks noGrp="1"/>
+          </p:cNvSpPr>
+          <p:nvPr>
+            <p:ph type="body" idx="3" sz="quarter"/>
+          </p:nvPr>
+        </p:nvSpPr>
+        <p:spPr/>
+        <p:txBody>
+          <a:bodyPr/>
+          <a:lstStyle/>
+          <a:p>
+            <a:r>
+              <a:t>照片鏈（photo_chain.py）已從規劃變成實測：兩日上傳資料中 1,126 台車有跨訂單車外照，掃描 15 台即抓到 RDE-0180 在訂單 #47353795 期間新增的右後保險桿刮痕——3 票一致（conf 0.85~0.88）、人工目檢證實，且此車不在任何索賠清單上（建議貼 slide_assets/RDE0180_照片鏈對照.png）。這治的正是唯一漏抓 RDH-3092 的病因：比對基準從「借車照」改成「同車前一單還車照」，品質與角度更一致，還能把責任精準回溯到單。品質 Gate（quality_gate.py）已擋模糊/過暗/過曝，角度檢核列下一步。長期自建輕量模型讓成本再降一個量級。</a:t>
+            </a:r>
+          </a:p>
+        </p:txBody>
+      </p:sp>
+      <p:sp>
+        <p:nvSpPr>
+          <p:cNvPr id="4" name="Slide Number Placeholder 3"/>
+          <p:cNvSpPr>
+            <a:spLocks noGrp="1"/>
+          </p:cNvSpPr>
+          <p:nvPr>
+            <p:ph type="sldNum" idx="5" sz="quarter"/>
+          </p:nvPr>
+        </p:nvSpPr>
+        <p:spPr/>
+      </p:sp>
+    </p:spTree>
+  </p:cSld>
+  <p:clrMapOvr>
+    <a:masterClrMapping/>
+  </p:clrMapOvr>
+</p:notes>
+</file>
+
+<file path=ppt/notesSlides/notesSlide15.xml><?xml version="1.0" encoding="utf-8"?>
+<p:notes xmlns:a="http://schemas.openxmlformats.org/drawingml/2006/main" xmlns:p="http://schemas.openxmlformats.org/presentationml/2006/main" xmlns:r="http://schemas.openxmlformats.org/officeDocument/2006/relationships">
+  <p:cSld>
+    <p:spTree>
+      <p:nvGrpSpPr>
+        <p:cNvPr id="1" name=""/>
+        <p:cNvGrpSpPr/>
+        <p:nvPr/>
+      </p:nvGrpSpPr>
+      <p:grpSpPr>
+        <a:xfrm>
+          <a:off x="0" y="0"/>
+          <a:ext cx="0" cy="0"/>
+          <a:chOff x="0" y="0"/>
+          <a:chExt cx="0" cy="0"/>
+        </a:xfrm>
+      </p:grpSpPr>
+      <p:sp>
+        <p:nvSpPr>
+          <p:cNvPr id="2" name="Slide Image Placeholder 1"/>
+          <p:cNvSpPr>
+            <a:spLocks noGrp="1"/>
+          </p:cNvSpPr>
+          <p:nvPr>
+            <p:ph type="sldImg" idx="2"/>
+          </p:nvPr>
+        </p:nvSpPr>
+        <p:spPr/>
+      </p:sp>
+      <p:sp>
+        <p:nvSpPr>
+          <p:cNvPr id="3" name="Notes Placeholder 2"/>
+          <p:cNvSpPr>
+            <a:spLocks noGrp="1"/>
+          </p:cNvSpPr>
+          <p:nvPr>
+            <p:ph type="body" idx="3" sz="quarter"/>
+          </p:nvPr>
+        </p:nvSpPr>
+        <p:spPr/>
+        <p:txBody>
+          <a:bodyPr/>
+          <a:lstStyle/>
+          <a:p>
+            <a:r>
+              <a:t>成本驗證（實際計價模型與帳單核對）列為後續工作；今天不把 API 成本當量化成果。效益面：自動判讀取代人工逐單翻圖，並抓回人工漏登的車損（已確認 2 筆）。</a:t>
+            </a:r>
+          </a:p>
+        </p:txBody>
+      </p:sp>
+      <p:sp>
+        <p:nvSpPr>
+          <p:cNvPr id="4" name="Slide Number Placeholder 3"/>
+          <p:cNvSpPr>
+            <a:spLocks noGrp="1"/>
+          </p:cNvSpPr>
+          <p:nvPr>
+            <p:ph type="sldNum" idx="5" sz="quarter"/>
+          </p:nvPr>
+        </p:nvSpPr>
+        <p:spPr/>
+      </p:sp>
+    </p:spTree>
+  </p:cSld>
+  <p:clrMapOvr>
+    <a:masterClrMapping/>
+  </p:clrMapOvr>
+</p:notes>
+</file>
+
+<file path=ppt/notesSlides/notesSlide16.xml><?xml version="1.0" encoding="utf-8"?>
 <p:notes xmlns:a="http://schemas.openxmlformats.org/drawingml/2006/main" xmlns:p="http://schemas.openxmlformats.org/presentationml/2006/main" xmlns:r="http://schemas.openxmlformats.org/officeDocument/2006/relationships">
   <p:cSld>
     <p:spTree>
@@ -4661,7 +4803,7 @@
                 </a:solidFill>
                 <a:latin typeface="Helvetica Neue"/>
               </a:rPr>
-              <a:t>遇到的困難</a:t>
+              <a:t>環節三：整備中心 — 從 AI 發現到車真的被修好</a:t>
             </a:r>
           </a:p>
         </p:txBody>
@@ -4700,7 +4842,7 @@
                 </a:solidFill>
                 <a:latin typeface="Helvetica Neue"/>
               </a:rPr>
-              <a:t>•  手持拍攝：角度光線落差極大</a:t>
+              <a:t>•  確認即開單 → 真推播（webhook）→ SSE 即時 → SLA 倒數與逾時升級</a:t>
             </a:r>
           </a:p>
           <a:p>
@@ -4716,7 +4858,7 @@
                 </a:solidFill>
                 <a:latin typeface="Helvetica Neue"/>
               </a:rPr>
-              <a:t>•  76% 照片 EXIF 方向錯置</a:t>
+              <a:t>•  站點手機版：接單 → 完工照 → 完工；車輛「整備中」自動解除</a:t>
             </a:r>
           </a:p>
           <a:p>
@@ -4732,7 +4874,7 @@
                 </a:solidFill>
                 <a:latin typeface="Helvetica Neue"/>
               </a:rPr>
-              <a:t>•  標籤噪音：未索賠 ≠ 無車損</a:t>
+              <a:t>•  完工照回寫為下一次比對基準：三環節閉環</a:t>
             </a:r>
           </a:p>
           <a:p>
@@ -4748,7 +4890,7 @@
                 </a:solidFill>
                 <a:latin typeface="Helvetica Neue"/>
               </a:rPr>
-              <a:t>•  漏抓主因：損傷部位未入鏡</a:t>
+              <a:t>•  未接的就標未接：LINE／簡訊、派單系統</a:t>
             </a:r>
           </a:p>
         </p:txBody>
@@ -4794,7 +4936,7 @@
                 </a:solidFill>
                 <a:latin typeface="Helvetica Neue"/>
               </a:rPr>
-              <a:t>未來方向</a:t>
+              <a:t>營運洞察 — 資料變成排班依據</a:t>
             </a:r>
           </a:p>
         </p:txBody>
@@ -4833,7 +4975,7 @@
                 </a:solidFill>
                 <a:latin typeface="Helvetica Neue"/>
               </a:rPr>
-              <a:t>•  ✅ 照片鏈已實作：真實資料抓到跨單新損</a:t>
+              <a:t>•  真實 log 4,820 單：還車尖峰 16–23 時佔 42%</a:t>
             </a:r>
           </a:p>
           <a:p>
@@ -4849,7 +4991,7 @@
                 </a:solidFill>
                 <a:latin typeface="Helvetica Neue"/>
               </a:rPr>
-              <a:t>•  App 拍攝端即時角度檢核（Gate 已做品質層）</a:t>
+              <a:t>•  凌晨 3–7 時最低 → 維修窗口</a:t>
             </a:r>
           </a:p>
           <a:p>
@@ -4865,7 +5007,7 @@
                 </a:solidFill>
                 <a:latin typeface="Helvetica Neue"/>
               </a:rPr>
-              <a:t>•  車內整潔 300 張標註校準</a:t>
+              <a:t>•  人工裁決 vs AI 一致率趨勢：越用越準的證據</a:t>
             </a:r>
           </a:p>
           <a:p>
@@ -4881,7 +5023,7 @@
                 </a:solidFill>
                 <a:latin typeface="Helvetica Neue"/>
               </a:rPr>
-              <a:t>•  複核資料 → 自建輕量模型</a:t>
+              <a:t>•  每張圖標口徑與 n；單日資料不做星期分布</a:t>
             </a:r>
           </a:p>
         </p:txBody>
@@ -4927,7 +5069,7 @@
                 </a:solidFill>
                 <a:latin typeface="Helvetica Neue"/>
               </a:rPr>
-              <a:t>成本與效益</a:t>
+              <a:t>遇到的困難</a:t>
             </a:r>
           </a:p>
         </p:txBody>
@@ -4966,7 +5108,7 @@
                 </a:solidFill>
                 <a:latin typeface="Helvetica Neue"/>
               </a:rPr>
-              <a:t>•  成本尚未完成正式驗證</a:t>
+              <a:t>•  手持拍攝：角度光線落差極大</a:t>
             </a:r>
           </a:p>
           <a:p>
@@ -4982,7 +5124,7 @@
                 </a:solidFill>
                 <a:latin typeface="Helvetica Neue"/>
               </a:rPr>
-              <a:t>•  本次不作量化成本宣稱</a:t>
+              <a:t>•  76% 照片 EXIF 方向錯置</a:t>
             </a:r>
           </a:p>
           <a:p>
@@ -4998,7 +5140,7 @@
                 </a:solidFill>
                 <a:latin typeface="Helvetica Neue"/>
               </a:rPr>
-              <a:t>•  取代人工逐單翻圖</a:t>
+              <a:t>•  標籤噪音：未索賠 ≠ 無車損</a:t>
             </a:r>
           </a:p>
           <a:p>
@@ -5014,7 +5156,7 @@
                 </a:solidFill>
                 <a:latin typeface="Helvetica Neue"/>
               </a:rPr>
-              <a:t>•  挽回未索賠漏損</a:t>
+              <a:t>•  漏抓主因：損傷部位未入鏡</a:t>
             </a:r>
           </a:p>
         </p:txBody>
@@ -5060,7 +5202,7 @@
                 </a:solidFill>
                 <a:latin typeface="Helvetica Neue"/>
               </a:rPr>
-              <a:t>結論</a:t>
+              <a:t>未來方向</a:t>
             </a:r>
           </a:p>
         </p:txBody>
@@ -5099,7 +5241,7 @@
                 </a:solidFill>
                 <a:latin typeface="Helvetica Neue"/>
               </a:rPr>
-              <a:t>•  零訓練・真實資料驗證</a:t>
+              <a:t>•  ✅ 照片鏈已實作：真實資料抓到跨單新損</a:t>
             </a:r>
           </a:p>
           <a:p>
@@ -5115,7 +5257,289 @@
                 </a:solidFill>
                 <a:latin typeface="Helvetica Neue"/>
               </a:rPr>
+              <a:t>•  App 拍攝端即時角度檢核（Gate 已做品質層）</a:t>
+            </a:r>
+          </a:p>
+          <a:p>
+            <a:pPr algn="l">
+              <a:spcAft>
+                <a:spcPts val="1400"/>
+              </a:spcAft>
+            </a:pPr>
+            <a:r>
+              <a:rPr sz="2400">
+                <a:solidFill>
+                  <a:srgbClr val="1A1A1A"/>
+                </a:solidFill>
+                <a:latin typeface="Helvetica Neue"/>
+              </a:rPr>
+              <a:t>•  車內整潔 300 張標註校準</a:t>
+            </a:r>
+          </a:p>
+          <a:p>
+            <a:pPr algn="l">
+              <a:spcAft>
+                <a:spcPts val="1400"/>
+              </a:spcAft>
+            </a:pPr>
+            <a:r>
+              <a:rPr sz="2400">
+                <a:solidFill>
+                  <a:srgbClr val="1A1A1A"/>
+                </a:solidFill>
+                <a:latin typeface="Helvetica Neue"/>
+              </a:rPr>
+              <a:t>•  複核資料 → 自建輕量模型</a:t>
+            </a:r>
+          </a:p>
+        </p:txBody>
+      </p:sp>
+    </p:spTree>
+  </p:cSld>
+  <p:clrMapOvr>
+    <a:masterClrMapping/>
+  </p:clrMapOvr>
+</p:sld>
+</file>
+
+<file path=ppt/slides/slide15.xml><?xml version="1.0" encoding="utf-8"?>
+<p:sld xmlns:a="http://schemas.openxmlformats.org/drawingml/2006/main" xmlns:p="http://schemas.openxmlformats.org/presentationml/2006/main" xmlns:r="http://schemas.openxmlformats.org/officeDocument/2006/relationships">
+  <p:cSld>
+    <p:spTree>
+      <p:nvGrpSpPr>
+        <p:cNvPr id="1" name=""/>
+        <p:cNvGrpSpPr/>
+        <p:nvPr/>
+      </p:nvGrpSpPr>
+      <p:grpSpPr/>
+      <p:sp>
+        <p:nvSpPr>
+          <p:cNvPr id="2" name="Title 1"/>
+          <p:cNvSpPr>
+            <a:spLocks noGrp="1"/>
+          </p:cNvSpPr>
+          <p:nvPr>
+            <p:ph type="title"/>
+          </p:nvPr>
+        </p:nvSpPr>
+        <p:spPr/>
+        <p:txBody>
+          <a:bodyPr/>
+          <a:lstStyle/>
+          <a:p>
+            <a:pPr algn="l"/>
+            <a:r>
+              <a:rPr sz="3200" b="1">
+                <a:solidFill>
+                  <a:srgbClr val="00794D"/>
+                </a:solidFill>
+                <a:latin typeface="Helvetica Neue"/>
+              </a:rPr>
+              <a:t>成本與效益</a:t>
+            </a:r>
+          </a:p>
+        </p:txBody>
+      </p:sp>
+      <p:sp>
+        <p:nvSpPr>
+          <p:cNvPr id="3" name="TextBox 2"/>
+          <p:cNvSpPr txBox="1"/>
+          <p:nvPr/>
+        </p:nvSpPr>
+        <p:spPr>
+          <a:xfrm>
+            <a:off x="731520" y="1645920"/>
+            <a:ext cx="10698480" cy="4572000"/>
+          </a:xfrm>
+          <a:prstGeom prst="rect">
+            <a:avLst/>
+          </a:prstGeom>
+          <a:noFill/>
+        </p:spPr>
+        <p:txBody>
+          <a:bodyPr wrap="square">
+            <a:spAutoFit/>
+          </a:bodyPr>
+          <a:lstStyle/>
+          <a:p>
+            <a:pPr algn="l">
+              <a:spcAft>
+                <a:spcPts val="1400"/>
+              </a:spcAft>
+            </a:pPr>
+            <a:r>
+              <a:rPr sz="2400">
+                <a:solidFill>
+                  <a:srgbClr val="1A1A1A"/>
+                </a:solidFill>
+                <a:latin typeface="Helvetica Neue"/>
+              </a:rPr>
+              <a:t>•  成本尚未完成正式驗證</a:t>
+            </a:r>
+          </a:p>
+          <a:p>
+            <a:pPr algn="l">
+              <a:spcAft>
+                <a:spcPts val="1400"/>
+              </a:spcAft>
+            </a:pPr>
+            <a:r>
+              <a:rPr sz="2400">
+                <a:solidFill>
+                  <a:srgbClr val="1A1A1A"/>
+                </a:solidFill>
+                <a:latin typeface="Helvetica Neue"/>
+              </a:rPr>
+              <a:t>•  本次不作量化成本宣稱</a:t>
+            </a:r>
+          </a:p>
+          <a:p>
+            <a:pPr algn="l">
+              <a:spcAft>
+                <a:spcPts val="1400"/>
+              </a:spcAft>
+            </a:pPr>
+            <a:r>
+              <a:rPr sz="2400">
+                <a:solidFill>
+                  <a:srgbClr val="1A1A1A"/>
+                </a:solidFill>
+                <a:latin typeface="Helvetica Neue"/>
+              </a:rPr>
+              <a:t>•  取代人工逐單翻圖</a:t>
+            </a:r>
+          </a:p>
+          <a:p>
+            <a:pPr algn="l">
+              <a:spcAft>
+                <a:spcPts val="1400"/>
+              </a:spcAft>
+            </a:pPr>
+            <a:r>
+              <a:rPr sz="2400">
+                <a:solidFill>
+                  <a:srgbClr val="1A1A1A"/>
+                </a:solidFill>
+                <a:latin typeface="Helvetica Neue"/>
+              </a:rPr>
+              <a:t>•  挽回未索賠漏損</a:t>
+            </a:r>
+          </a:p>
+        </p:txBody>
+      </p:sp>
+    </p:spTree>
+  </p:cSld>
+  <p:clrMapOvr>
+    <a:masterClrMapping/>
+  </p:clrMapOvr>
+</p:sld>
+</file>
+
+<file path=ppt/slides/slide16.xml><?xml version="1.0" encoding="utf-8"?>
+<p:sld xmlns:a="http://schemas.openxmlformats.org/drawingml/2006/main" xmlns:p="http://schemas.openxmlformats.org/presentationml/2006/main" xmlns:r="http://schemas.openxmlformats.org/officeDocument/2006/relationships">
+  <p:cSld>
+    <p:spTree>
+      <p:nvGrpSpPr>
+        <p:cNvPr id="1" name=""/>
+        <p:cNvGrpSpPr/>
+        <p:nvPr/>
+      </p:nvGrpSpPr>
+      <p:grpSpPr/>
+      <p:sp>
+        <p:nvSpPr>
+          <p:cNvPr id="2" name="Title 1"/>
+          <p:cNvSpPr>
+            <a:spLocks noGrp="1"/>
+          </p:cNvSpPr>
+          <p:nvPr>
+            <p:ph type="title"/>
+          </p:nvPr>
+        </p:nvSpPr>
+        <p:spPr/>
+        <p:txBody>
+          <a:bodyPr/>
+          <a:lstStyle/>
+          <a:p>
+            <a:pPr algn="l"/>
+            <a:r>
+              <a:rPr sz="3200" b="1">
+                <a:solidFill>
+                  <a:srgbClr val="00794D"/>
+                </a:solidFill>
+                <a:latin typeface="Helvetica Neue"/>
+              </a:rPr>
+              <a:t>結論</a:t>
+            </a:r>
+          </a:p>
+        </p:txBody>
+      </p:sp>
+      <p:sp>
+        <p:nvSpPr>
+          <p:cNvPr id="3" name="TextBox 2"/>
+          <p:cNvSpPr txBox="1"/>
+          <p:nvPr/>
+        </p:nvSpPr>
+        <p:spPr>
+          <a:xfrm>
+            <a:off x="731520" y="1645920"/>
+            <a:ext cx="10698480" cy="4572000"/>
+          </a:xfrm>
+          <a:prstGeom prst="rect">
+            <a:avLst/>
+          </a:prstGeom>
+          <a:noFill/>
+        </p:spPr>
+        <p:txBody>
+          <a:bodyPr wrap="square">
+            <a:spAutoFit/>
+          </a:bodyPr>
+          <a:lstStyle/>
+          <a:p>
+            <a:pPr algn="l">
+              <a:spcAft>
+                <a:spcPts val="1400"/>
+              </a:spcAft>
+            </a:pPr>
+            <a:r>
+              <a:rPr sz="2400">
+                <a:solidFill>
+                  <a:srgbClr val="1A1A1A"/>
+                </a:solidFill>
+                <a:latin typeface="Helvetica Neue"/>
+              </a:rPr>
+              <a:t>•  零訓練・真實資料驗證</a:t>
+            </a:r>
+          </a:p>
+          <a:p>
+            <a:pPr algn="l">
+              <a:spcAft>
+                <a:spcPts val="1400"/>
+              </a:spcAft>
+            </a:pPr>
+            <a:r>
+              <a:rPr sz="2400">
+                <a:solidFill>
+                  <a:srgbClr val="1A1A1A"/>
+                </a:solidFill>
+                <a:latin typeface="Helvetica Neue"/>
+              </a:rPr>
               <a:t>•  重標後 100% 召回・1 筆誤報</a:t>
+            </a:r>
+          </a:p>
+          <a:p>
+            <a:pPr algn="l">
+              <a:spcAft>
+                <a:spcPts val="1400"/>
+              </a:spcAft>
+            </a:pPr>
+            <a:r>
+              <a:rPr sz="2400">
+                <a:solidFill>
+                  <a:srgbClr val="1A1A1A"/>
+                </a:solidFill>
+                <a:latin typeface="Helvetica Neue"/>
+              </a:rPr>
+              <a:t>•  AI 發現 → 人工把關 → 真通知 → 整備閉環</a:t>
             </a:r>
           </a:p>
           <a:p>
@@ -5748,7 +6172,7 @@
                 </a:solidFill>
                 <a:latin typeface="Helvetica Neue"/>
               </a:rPr>
-              <a:t>•  召回率：快篩 81% → 級聯複核 86%</a:t>
+              <a:t>•  召回率：快篩 81% → 級聯複核 85.7%（原始索賠標籤，n=141）</a:t>
             </a:r>
           </a:p>
           <a:p>
